--- a/plots/adjusted_age_meld3.pptx
+++ b/plots/adjusted_age_meld3.pptx
@@ -2951,528 +2951,528 @@
           </p:nvSpPr>
           <p:spPr>
             <a:xfrm>
-              <a:off x="1019512" y="3772121"/>
-              <a:ext cx="7591371" cy="1292774"/>
+              <a:off x="1019512" y="3266247"/>
+              <a:ext cx="7591371" cy="1798648"/>
             </a:xfrm>
             <a:custGeom>
               <a:avLst/>
               <a:pathLst>
-                <a:path w="7591371" h="1292774">
+                <a:path w="7591371" h="1798648">
                   <a:moveTo>
-                    <a:pt x="0" y="1292774"/>
+                    <a:pt x="0" y="1798648"/>
                   </a:moveTo>
                   <a:lnTo>
-                    <a:pt x="84348" y="1292774"/>
-                  </a:lnTo>
-                  <a:lnTo>
-                    <a:pt x="84348" y="1268712"/>
-                  </a:lnTo>
-                  <a:lnTo>
-                    <a:pt x="168697" y="1268712"/>
-                  </a:lnTo>
-                  <a:lnTo>
-                    <a:pt x="168697" y="1244627"/>
-                  </a:lnTo>
-                  <a:lnTo>
-                    <a:pt x="253045" y="1244627"/>
-                  </a:lnTo>
-                  <a:lnTo>
-                    <a:pt x="253045" y="1220444"/>
-                  </a:lnTo>
-                  <a:lnTo>
-                    <a:pt x="337394" y="1220444"/>
-                  </a:lnTo>
-                  <a:lnTo>
-                    <a:pt x="337394" y="1208236"/>
-                  </a:lnTo>
-                  <a:lnTo>
-                    <a:pt x="421742" y="1208236"/>
-                  </a:lnTo>
-                  <a:lnTo>
-                    <a:pt x="421742" y="1183874"/>
-                  </a:lnTo>
-                  <a:lnTo>
-                    <a:pt x="506091" y="1183874"/>
-                  </a:lnTo>
-                  <a:lnTo>
-                    <a:pt x="506091" y="1159506"/>
-                  </a:lnTo>
-                  <a:lnTo>
-                    <a:pt x="590440" y="1159506"/>
-                  </a:lnTo>
-                  <a:lnTo>
-                    <a:pt x="590440" y="1122988"/>
-                  </a:lnTo>
-                  <a:lnTo>
-                    <a:pt x="674788" y="1122988"/>
-                  </a:lnTo>
-                  <a:lnTo>
-                    <a:pt x="674788" y="1110688"/>
-                  </a:lnTo>
-                  <a:lnTo>
-                    <a:pt x="759137" y="1110688"/>
-                  </a:lnTo>
-                  <a:lnTo>
-                    <a:pt x="759137" y="1049724"/>
-                  </a:lnTo>
-                  <a:lnTo>
-                    <a:pt x="843485" y="1049724"/>
-                  </a:lnTo>
-                  <a:lnTo>
-                    <a:pt x="843485" y="1012623"/>
-                  </a:lnTo>
-                  <a:lnTo>
-                    <a:pt x="927834" y="1012623"/>
-                  </a:lnTo>
-                  <a:lnTo>
-                    <a:pt x="927834" y="963023"/>
-                  </a:lnTo>
-                  <a:lnTo>
-                    <a:pt x="1012182" y="963023"/>
-                  </a:lnTo>
-                  <a:lnTo>
-                    <a:pt x="1012182" y="876513"/>
-                  </a:lnTo>
-                  <a:lnTo>
-                    <a:pt x="1096531" y="876513"/>
-                  </a:lnTo>
-                  <a:lnTo>
-                    <a:pt x="1096531" y="838393"/>
-                  </a:lnTo>
-                  <a:lnTo>
-                    <a:pt x="1180880" y="838393"/>
-                  </a:lnTo>
-                  <a:lnTo>
-                    <a:pt x="1180880" y="812639"/>
-                  </a:lnTo>
-                  <a:lnTo>
-                    <a:pt x="1265228" y="812639"/>
-                  </a:lnTo>
-                  <a:lnTo>
-                    <a:pt x="1265228" y="774115"/>
-                  </a:lnTo>
-                  <a:lnTo>
-                    <a:pt x="1349577" y="774115"/>
-                  </a:lnTo>
-                  <a:lnTo>
-                    <a:pt x="1349577" y="748130"/>
-                  </a:lnTo>
-                  <a:lnTo>
-                    <a:pt x="1433925" y="748130"/>
-                  </a:lnTo>
-                  <a:lnTo>
-                    <a:pt x="1433925" y="722086"/>
-                  </a:lnTo>
-                  <a:lnTo>
-                    <a:pt x="1518274" y="722086"/>
-                  </a:lnTo>
-                  <a:lnTo>
-                    <a:pt x="1518274" y="670126"/>
-                  </a:lnTo>
-                  <a:lnTo>
-                    <a:pt x="1602622" y="670126"/>
-                  </a:lnTo>
-                  <a:lnTo>
-                    <a:pt x="1602622" y="656926"/>
-                  </a:lnTo>
-                  <a:lnTo>
-                    <a:pt x="1686971" y="656926"/>
-                  </a:lnTo>
-                  <a:lnTo>
-                    <a:pt x="1686971" y="643741"/>
-                  </a:lnTo>
-                  <a:lnTo>
-                    <a:pt x="1771320" y="643741"/>
-                  </a:lnTo>
-                  <a:lnTo>
-                    <a:pt x="1771320" y="643741"/>
-                  </a:lnTo>
-                  <a:lnTo>
-                    <a:pt x="1855668" y="643741"/>
-                  </a:lnTo>
-                  <a:lnTo>
-                    <a:pt x="1855668" y="590618"/>
-                  </a:lnTo>
-                  <a:lnTo>
-                    <a:pt x="1940017" y="590618"/>
-                  </a:lnTo>
-                  <a:lnTo>
-                    <a:pt x="1940017" y="590618"/>
-                  </a:lnTo>
-                  <a:lnTo>
-                    <a:pt x="2024365" y="590618"/>
-                  </a:lnTo>
-                  <a:lnTo>
-                    <a:pt x="2024365" y="577206"/>
-                  </a:lnTo>
-                  <a:lnTo>
-                    <a:pt x="2108714" y="577206"/>
-                  </a:lnTo>
-                  <a:lnTo>
-                    <a:pt x="2108714" y="550427"/>
-                  </a:lnTo>
-                  <a:lnTo>
-                    <a:pt x="2193062" y="550427"/>
-                  </a:lnTo>
-                  <a:lnTo>
-                    <a:pt x="2193062" y="497198"/>
-                  </a:lnTo>
-                  <a:lnTo>
-                    <a:pt x="2277411" y="497198"/>
-                  </a:lnTo>
-                  <a:lnTo>
-                    <a:pt x="2277411" y="483670"/>
-                  </a:lnTo>
-                  <a:lnTo>
-                    <a:pt x="2361760" y="483670"/>
-                  </a:lnTo>
-                  <a:lnTo>
-                    <a:pt x="2361760" y="429814"/>
-                  </a:lnTo>
-                  <a:lnTo>
-                    <a:pt x="2446108" y="429814"/>
-                  </a:lnTo>
-                  <a:lnTo>
-                    <a:pt x="2446108" y="389071"/>
-                  </a:lnTo>
-                  <a:lnTo>
-                    <a:pt x="2530457" y="389071"/>
-                  </a:lnTo>
-                  <a:lnTo>
-                    <a:pt x="2530457" y="348303"/>
-                  </a:lnTo>
-                  <a:lnTo>
-                    <a:pt x="2614805" y="348303"/>
-                  </a:lnTo>
-                  <a:lnTo>
-                    <a:pt x="2614805" y="334522"/>
-                  </a:lnTo>
-                  <a:lnTo>
-                    <a:pt x="2699154" y="334522"/>
-                  </a:lnTo>
-                  <a:lnTo>
-                    <a:pt x="2699154" y="334522"/>
-                  </a:lnTo>
-                  <a:lnTo>
-                    <a:pt x="2783503" y="334522"/>
-                  </a:lnTo>
-                  <a:lnTo>
-                    <a:pt x="2783503" y="334522"/>
-                  </a:lnTo>
-                  <a:lnTo>
-                    <a:pt x="2867851" y="334522"/>
-                  </a:lnTo>
-                  <a:lnTo>
-                    <a:pt x="2867851" y="293448"/>
-                  </a:lnTo>
-                  <a:lnTo>
-                    <a:pt x="2952200" y="293448"/>
-                  </a:lnTo>
-                  <a:lnTo>
-                    <a:pt x="2952200" y="265904"/>
-                  </a:lnTo>
-                  <a:lnTo>
-                    <a:pt x="3036548" y="265904"/>
-                  </a:lnTo>
-                  <a:lnTo>
-                    <a:pt x="3036548" y="265904"/>
-                  </a:lnTo>
-                  <a:lnTo>
-                    <a:pt x="3120897" y="265904"/>
-                  </a:lnTo>
-                  <a:lnTo>
-                    <a:pt x="3120897" y="252091"/>
-                  </a:lnTo>
-                  <a:lnTo>
-                    <a:pt x="3205245" y="252091"/>
-                  </a:lnTo>
-                  <a:lnTo>
-                    <a:pt x="3205245" y="238280"/>
-                  </a:lnTo>
-                  <a:lnTo>
-                    <a:pt x="3289594" y="238280"/>
-                  </a:lnTo>
-                  <a:lnTo>
-                    <a:pt x="3289594" y="238280"/>
-                  </a:lnTo>
-                  <a:lnTo>
-                    <a:pt x="3373943" y="238280"/>
-                  </a:lnTo>
-                  <a:lnTo>
-                    <a:pt x="3373943" y="238280"/>
-                  </a:lnTo>
-                  <a:lnTo>
-                    <a:pt x="3458291" y="238280"/>
-                  </a:lnTo>
-                  <a:lnTo>
-                    <a:pt x="3458291" y="238280"/>
-                  </a:lnTo>
-                  <a:lnTo>
-                    <a:pt x="3542640" y="238280"/>
-                  </a:lnTo>
-                  <a:lnTo>
-                    <a:pt x="3542640" y="238280"/>
-                  </a:lnTo>
-                  <a:lnTo>
-                    <a:pt x="3626988" y="238280"/>
-                  </a:lnTo>
-                  <a:lnTo>
-                    <a:pt x="3626988" y="238280"/>
-                  </a:lnTo>
-                  <a:lnTo>
-                    <a:pt x="3711337" y="238280"/>
-                  </a:lnTo>
-                  <a:lnTo>
-                    <a:pt x="3711337" y="238280"/>
-                  </a:lnTo>
-                  <a:lnTo>
-                    <a:pt x="3795685" y="238280"/>
-                  </a:lnTo>
-                  <a:lnTo>
-                    <a:pt x="3795685" y="224466"/>
-                  </a:lnTo>
-                  <a:lnTo>
-                    <a:pt x="3880034" y="224466"/>
-                  </a:lnTo>
-                  <a:lnTo>
-                    <a:pt x="3880034" y="224466"/>
-                  </a:lnTo>
-                  <a:lnTo>
-                    <a:pt x="3964383" y="224466"/>
-                  </a:lnTo>
-                  <a:lnTo>
-                    <a:pt x="3964383" y="210627"/>
-                  </a:lnTo>
-                  <a:lnTo>
-                    <a:pt x="4048731" y="210627"/>
-                  </a:lnTo>
-                  <a:lnTo>
-                    <a:pt x="4048731" y="196755"/>
-                  </a:lnTo>
-                  <a:lnTo>
-                    <a:pt x="4133080" y="196755"/>
-                  </a:lnTo>
-                  <a:lnTo>
-                    <a:pt x="4133080" y="169149"/>
-                  </a:lnTo>
-                  <a:lnTo>
-                    <a:pt x="4217428" y="169149"/>
-                  </a:lnTo>
-                  <a:lnTo>
-                    <a:pt x="4217428" y="169149"/>
-                  </a:lnTo>
-                  <a:lnTo>
-                    <a:pt x="4301777" y="169149"/>
-                  </a:lnTo>
-                  <a:lnTo>
-                    <a:pt x="4301777" y="169149"/>
-                  </a:lnTo>
-                  <a:lnTo>
-                    <a:pt x="4386125" y="169149"/>
-                  </a:lnTo>
-                  <a:lnTo>
-                    <a:pt x="4386125" y="155228"/>
-                  </a:lnTo>
-                  <a:lnTo>
-                    <a:pt x="4470474" y="155228"/>
-                  </a:lnTo>
-                  <a:lnTo>
-                    <a:pt x="4470474" y="155228"/>
-                  </a:lnTo>
-                  <a:lnTo>
-                    <a:pt x="4554823" y="155228"/>
-                  </a:lnTo>
-                  <a:lnTo>
-                    <a:pt x="4554823" y="141301"/>
-                  </a:lnTo>
-                  <a:lnTo>
-                    <a:pt x="4639171" y="141301"/>
-                  </a:lnTo>
-                  <a:lnTo>
-                    <a:pt x="4639171" y="141301"/>
-                  </a:lnTo>
-                  <a:lnTo>
-                    <a:pt x="4723520" y="141301"/>
-                  </a:lnTo>
-                  <a:lnTo>
-                    <a:pt x="4723520" y="141301"/>
-                  </a:lnTo>
-                  <a:lnTo>
-                    <a:pt x="4807868" y="141301"/>
-                  </a:lnTo>
-                  <a:lnTo>
-                    <a:pt x="4807868" y="141301"/>
-                  </a:lnTo>
-                  <a:lnTo>
-                    <a:pt x="4892217" y="141301"/>
-                  </a:lnTo>
-                  <a:lnTo>
-                    <a:pt x="4892217" y="141301"/>
-                  </a:lnTo>
-                  <a:lnTo>
-                    <a:pt x="4976565" y="141301"/>
-                  </a:lnTo>
-                  <a:lnTo>
-                    <a:pt x="4976565" y="127346"/>
-                  </a:lnTo>
-                  <a:lnTo>
-                    <a:pt x="5060914" y="127346"/>
-                  </a:lnTo>
-                  <a:lnTo>
-                    <a:pt x="5060914" y="99523"/>
-                  </a:lnTo>
-                  <a:lnTo>
-                    <a:pt x="5145263" y="99523"/>
-                  </a:lnTo>
-                  <a:lnTo>
-                    <a:pt x="5145263" y="99523"/>
-                  </a:lnTo>
-                  <a:lnTo>
-                    <a:pt x="5229611" y="99523"/>
-                  </a:lnTo>
-                  <a:lnTo>
-                    <a:pt x="5229611" y="99523"/>
-                  </a:lnTo>
-                  <a:lnTo>
-                    <a:pt x="5313960" y="99523"/>
-                  </a:lnTo>
-                  <a:lnTo>
-                    <a:pt x="5313960" y="99523"/>
-                  </a:lnTo>
-                  <a:lnTo>
-                    <a:pt x="5398308" y="99523"/>
-                  </a:lnTo>
-                  <a:lnTo>
-                    <a:pt x="5398308" y="85547"/>
-                  </a:lnTo>
-                  <a:lnTo>
-                    <a:pt x="5482657" y="85547"/>
-                  </a:lnTo>
-                  <a:lnTo>
-                    <a:pt x="5482657" y="71588"/>
-                  </a:lnTo>
-                  <a:lnTo>
-                    <a:pt x="5567006" y="71588"/>
-                  </a:lnTo>
-                  <a:lnTo>
-                    <a:pt x="5567006" y="71588"/>
-                  </a:lnTo>
-                  <a:lnTo>
-                    <a:pt x="5651354" y="71588"/>
-                  </a:lnTo>
-                  <a:lnTo>
-                    <a:pt x="5651354" y="71588"/>
-                  </a:lnTo>
-                  <a:lnTo>
-                    <a:pt x="5735703" y="71588"/>
-                  </a:lnTo>
-                  <a:lnTo>
-                    <a:pt x="5735703" y="57557"/>
-                  </a:lnTo>
-                  <a:lnTo>
-                    <a:pt x="5820051" y="57557"/>
-                  </a:lnTo>
-                  <a:lnTo>
-                    <a:pt x="5820051" y="57557"/>
-                  </a:lnTo>
-                  <a:lnTo>
-                    <a:pt x="5904400" y="57557"/>
-                  </a:lnTo>
-                  <a:lnTo>
-                    <a:pt x="5904400" y="57557"/>
-                  </a:lnTo>
-                  <a:lnTo>
-                    <a:pt x="5988748" y="57557"/>
-                  </a:lnTo>
-                  <a:lnTo>
-                    <a:pt x="5988748" y="57557"/>
-                  </a:lnTo>
-                  <a:lnTo>
-                    <a:pt x="6073097" y="57557"/>
-                  </a:lnTo>
-                  <a:lnTo>
-                    <a:pt x="6073097" y="57557"/>
-                  </a:lnTo>
-                  <a:lnTo>
-                    <a:pt x="6157446" y="57557"/>
-                  </a:lnTo>
-                  <a:lnTo>
-                    <a:pt x="6157446" y="28906"/>
-                  </a:lnTo>
-                  <a:lnTo>
-                    <a:pt x="6241794" y="28906"/>
-                  </a:lnTo>
-                  <a:lnTo>
-                    <a:pt x="6241794" y="28906"/>
-                  </a:lnTo>
-                  <a:lnTo>
-                    <a:pt x="6326143" y="28906"/>
-                  </a:lnTo>
-                  <a:lnTo>
-                    <a:pt x="6326143" y="28906"/>
-                  </a:lnTo>
-                  <a:lnTo>
-                    <a:pt x="6410491" y="28906"/>
-                  </a:lnTo>
-                  <a:lnTo>
-                    <a:pt x="6410491" y="28906"/>
-                  </a:lnTo>
-                  <a:lnTo>
-                    <a:pt x="6494840" y="28906"/>
-                  </a:lnTo>
-                  <a:lnTo>
-                    <a:pt x="6494840" y="28906"/>
-                  </a:lnTo>
-                  <a:lnTo>
-                    <a:pt x="6579188" y="28906"/>
-                  </a:lnTo>
-                  <a:lnTo>
-                    <a:pt x="6579188" y="28906"/>
-                  </a:lnTo>
-                  <a:lnTo>
-                    <a:pt x="6663537" y="28906"/>
-                  </a:lnTo>
-                  <a:lnTo>
-                    <a:pt x="6663537" y="28906"/>
-                  </a:lnTo>
-                  <a:lnTo>
-                    <a:pt x="6747886" y="28906"/>
-                  </a:lnTo>
-                  <a:lnTo>
-                    <a:pt x="6747886" y="14449"/>
-                  </a:lnTo>
-                  <a:lnTo>
-                    <a:pt x="6832234" y="14449"/>
-                  </a:lnTo>
-                  <a:lnTo>
-                    <a:pt x="6832234" y="14449"/>
-                  </a:lnTo>
-                  <a:lnTo>
-                    <a:pt x="6916583" y="14449"/>
-                  </a:lnTo>
-                  <a:lnTo>
-                    <a:pt x="6916583" y="14449"/>
-                  </a:lnTo>
-                  <a:lnTo>
-                    <a:pt x="7000931" y="14449"/>
-                  </a:lnTo>
-                  <a:lnTo>
-                    <a:pt x="7000931" y="14449"/>
-                  </a:lnTo>
-                  <a:lnTo>
-                    <a:pt x="7085280" y="14449"/>
-                  </a:lnTo>
-                  <a:lnTo>
-                    <a:pt x="7085280" y="14449"/>
-                  </a:lnTo>
-                  <a:lnTo>
-                    <a:pt x="7169628" y="14449"/>
-                  </a:lnTo>
-                  <a:lnTo>
-                    <a:pt x="7169628" y="14449"/>
-                  </a:lnTo>
-                  <a:lnTo>
-                    <a:pt x="7253977" y="14449"/>
+                    <a:pt x="84348" y="1798648"/>
+                  </a:lnTo>
+                  <a:lnTo>
+                    <a:pt x="84348" y="1760698"/>
+                  </a:lnTo>
+                  <a:lnTo>
+                    <a:pt x="168697" y="1760698"/>
+                  </a:lnTo>
+                  <a:lnTo>
+                    <a:pt x="168697" y="1722873"/>
+                  </a:lnTo>
+                  <a:lnTo>
+                    <a:pt x="253045" y="1722873"/>
+                  </a:lnTo>
+                  <a:lnTo>
+                    <a:pt x="253045" y="1685054"/>
+                  </a:lnTo>
+                  <a:lnTo>
+                    <a:pt x="337394" y="1685054"/>
+                  </a:lnTo>
+                  <a:lnTo>
+                    <a:pt x="337394" y="1666025"/>
+                  </a:lnTo>
+                  <a:lnTo>
+                    <a:pt x="421742" y="1666025"/>
+                  </a:lnTo>
+                  <a:lnTo>
+                    <a:pt x="421742" y="1628173"/>
+                  </a:lnTo>
+                  <a:lnTo>
+                    <a:pt x="506091" y="1628173"/>
+                  </a:lnTo>
+                  <a:lnTo>
+                    <a:pt x="506091" y="1590478"/>
+                  </a:lnTo>
+                  <a:lnTo>
+                    <a:pt x="590440" y="1590478"/>
+                  </a:lnTo>
+                  <a:lnTo>
+                    <a:pt x="590440" y="1534300"/>
+                  </a:lnTo>
+                  <a:lnTo>
+                    <a:pt x="674788" y="1534300"/>
+                  </a:lnTo>
+                  <a:lnTo>
+                    <a:pt x="674788" y="1515462"/>
+                  </a:lnTo>
+                  <a:lnTo>
+                    <a:pt x="759137" y="1515462"/>
+                  </a:lnTo>
+                  <a:lnTo>
+                    <a:pt x="759137" y="1422725"/>
+                  </a:lnTo>
+                  <a:lnTo>
+                    <a:pt x="843485" y="1422725"/>
+                  </a:lnTo>
+                  <a:lnTo>
+                    <a:pt x="843485" y="1366805"/>
+                  </a:lnTo>
+                  <a:lnTo>
+                    <a:pt x="927834" y="1366805"/>
+                  </a:lnTo>
+                  <a:lnTo>
+                    <a:pt x="927834" y="1292659"/>
+                  </a:lnTo>
+                  <a:lnTo>
+                    <a:pt x="1012182" y="1292659"/>
+                  </a:lnTo>
+                  <a:lnTo>
+                    <a:pt x="1012182" y="1165033"/>
+                  </a:lnTo>
+                  <a:lnTo>
+                    <a:pt x="1096531" y="1165033"/>
+                  </a:lnTo>
+                  <a:lnTo>
+                    <a:pt x="1096531" y="1109484"/>
+                  </a:lnTo>
+                  <a:lnTo>
+                    <a:pt x="1180880" y="1109484"/>
+                  </a:lnTo>
+                  <a:lnTo>
+                    <a:pt x="1180880" y="1072197"/>
+                  </a:lnTo>
+                  <a:lnTo>
+                    <a:pt x="1265228" y="1072197"/>
+                  </a:lnTo>
+                  <a:lnTo>
+                    <a:pt x="1265228" y="1016784"/>
+                  </a:lnTo>
+                  <a:lnTo>
+                    <a:pt x="1349577" y="1016784"/>
+                  </a:lnTo>
+                  <a:lnTo>
+                    <a:pt x="1349577" y="979654"/>
+                  </a:lnTo>
+                  <a:lnTo>
+                    <a:pt x="1433925" y="979654"/>
+                  </a:lnTo>
+                  <a:lnTo>
+                    <a:pt x="1433925" y="942642"/>
+                  </a:lnTo>
+                  <a:lnTo>
+                    <a:pt x="1518274" y="942642"/>
+                  </a:lnTo>
+                  <a:lnTo>
+                    <a:pt x="1518274" y="869403"/>
+                  </a:lnTo>
+                  <a:lnTo>
+                    <a:pt x="1602622" y="869403"/>
+                  </a:lnTo>
+                  <a:lnTo>
+                    <a:pt x="1602622" y="850927"/>
+                  </a:lnTo>
+                  <a:lnTo>
+                    <a:pt x="1686971" y="850927"/>
+                  </a:lnTo>
+                  <a:lnTo>
+                    <a:pt x="1686971" y="832522"/>
+                  </a:lnTo>
+                  <a:lnTo>
+                    <a:pt x="1771320" y="832522"/>
+                  </a:lnTo>
+                  <a:lnTo>
+                    <a:pt x="1771320" y="832522"/>
+                  </a:lnTo>
+                  <a:lnTo>
+                    <a:pt x="1855668" y="832522"/>
+                  </a:lnTo>
+                  <a:lnTo>
+                    <a:pt x="1855668" y="758905"/>
+                  </a:lnTo>
+                  <a:lnTo>
+                    <a:pt x="1940017" y="758905"/>
+                  </a:lnTo>
+                  <a:lnTo>
+                    <a:pt x="1940017" y="758905"/>
+                  </a:lnTo>
+                  <a:lnTo>
+                    <a:pt x="2024365" y="758905"/>
+                  </a:lnTo>
+                  <a:lnTo>
+                    <a:pt x="2024365" y="740453"/>
+                  </a:lnTo>
+                  <a:lnTo>
+                    <a:pt x="2108714" y="740453"/>
+                  </a:lnTo>
+                  <a:lnTo>
+                    <a:pt x="2108714" y="703778"/>
+                  </a:lnTo>
+                  <a:lnTo>
+                    <a:pt x="2193062" y="703778"/>
+                  </a:lnTo>
+                  <a:lnTo>
+                    <a:pt x="2193062" y="631528"/>
+                  </a:lnTo>
+                  <a:lnTo>
+                    <a:pt x="2277411" y="631528"/>
+                  </a:lnTo>
+                  <a:lnTo>
+                    <a:pt x="2277411" y="613306"/>
+                  </a:lnTo>
+                  <a:lnTo>
+                    <a:pt x="2361760" y="613306"/>
+                  </a:lnTo>
+                  <a:lnTo>
+                    <a:pt x="2361760" y="541321"/>
+                  </a:lnTo>
+                  <a:lnTo>
+                    <a:pt x="2446108" y="541321"/>
+                  </a:lnTo>
+                  <a:lnTo>
+                    <a:pt x="2446108" y="487465"/>
+                  </a:lnTo>
+                  <a:lnTo>
+                    <a:pt x="2530457" y="487465"/>
+                  </a:lnTo>
+                  <a:lnTo>
+                    <a:pt x="2530457" y="434098"/>
+                  </a:lnTo>
+                  <a:lnTo>
+                    <a:pt x="2614805" y="434098"/>
+                  </a:lnTo>
+                  <a:lnTo>
+                    <a:pt x="2614805" y="416176"/>
+                  </a:lnTo>
+                  <a:lnTo>
+                    <a:pt x="2699154" y="416176"/>
+                  </a:lnTo>
+                  <a:lnTo>
+                    <a:pt x="2699154" y="416176"/>
+                  </a:lnTo>
+                  <a:lnTo>
+                    <a:pt x="2783503" y="416176"/>
+                  </a:lnTo>
+                  <a:lnTo>
+                    <a:pt x="2783503" y="416176"/>
+                  </a:lnTo>
+                  <a:lnTo>
+                    <a:pt x="2867851" y="416176"/>
+                  </a:lnTo>
+                  <a:lnTo>
+                    <a:pt x="2867851" y="363120"/>
+                  </a:lnTo>
+                  <a:lnTo>
+                    <a:pt x="2952200" y="363120"/>
+                  </a:lnTo>
+                  <a:lnTo>
+                    <a:pt x="2952200" y="327843"/>
+                  </a:lnTo>
+                  <a:lnTo>
+                    <a:pt x="3036548" y="327843"/>
+                  </a:lnTo>
+                  <a:lnTo>
+                    <a:pt x="3036548" y="327843"/>
+                  </a:lnTo>
+                  <a:lnTo>
+                    <a:pt x="3120897" y="327843"/>
+                  </a:lnTo>
+                  <a:lnTo>
+                    <a:pt x="3120897" y="310243"/>
+                  </a:lnTo>
+                  <a:lnTo>
+                    <a:pt x="3205245" y="310243"/>
+                  </a:lnTo>
+                  <a:lnTo>
+                    <a:pt x="3205245" y="292708"/>
+                  </a:lnTo>
+                  <a:lnTo>
+                    <a:pt x="3289594" y="292708"/>
+                  </a:lnTo>
+                  <a:lnTo>
+                    <a:pt x="3289594" y="292708"/>
+                  </a:lnTo>
+                  <a:lnTo>
+                    <a:pt x="3373943" y="292708"/>
+                  </a:lnTo>
+                  <a:lnTo>
+                    <a:pt x="3373943" y="292708"/>
+                  </a:lnTo>
+                  <a:lnTo>
+                    <a:pt x="3458291" y="292708"/>
+                  </a:lnTo>
+                  <a:lnTo>
+                    <a:pt x="3458291" y="292708"/>
+                  </a:lnTo>
+                  <a:lnTo>
+                    <a:pt x="3542640" y="292708"/>
+                  </a:lnTo>
+                  <a:lnTo>
+                    <a:pt x="3542640" y="292708"/>
+                  </a:lnTo>
+                  <a:lnTo>
+                    <a:pt x="3626988" y="292708"/>
+                  </a:lnTo>
+                  <a:lnTo>
+                    <a:pt x="3626988" y="292708"/>
+                  </a:lnTo>
+                  <a:lnTo>
+                    <a:pt x="3711337" y="292708"/>
+                  </a:lnTo>
+                  <a:lnTo>
+                    <a:pt x="3711337" y="292708"/>
+                  </a:lnTo>
+                  <a:lnTo>
+                    <a:pt x="3795685" y="292708"/>
+                  </a:lnTo>
+                  <a:lnTo>
+                    <a:pt x="3795685" y="275230"/>
+                  </a:lnTo>
+                  <a:lnTo>
+                    <a:pt x="3880034" y="275230"/>
+                  </a:lnTo>
+                  <a:lnTo>
+                    <a:pt x="3880034" y="275230"/>
+                  </a:lnTo>
+                  <a:lnTo>
+                    <a:pt x="3964383" y="275230"/>
+                  </a:lnTo>
+                  <a:lnTo>
+                    <a:pt x="3964383" y="257781"/>
+                  </a:lnTo>
+                  <a:lnTo>
+                    <a:pt x="4048731" y="257781"/>
+                  </a:lnTo>
+                  <a:lnTo>
+                    <a:pt x="4048731" y="240355"/>
+                  </a:lnTo>
+                  <a:lnTo>
+                    <a:pt x="4133080" y="240355"/>
+                  </a:lnTo>
+                  <a:lnTo>
+                    <a:pt x="4133080" y="205861"/>
+                  </a:lnTo>
+                  <a:lnTo>
+                    <a:pt x="4217428" y="205861"/>
+                  </a:lnTo>
+                  <a:lnTo>
+                    <a:pt x="4217428" y="205861"/>
+                  </a:lnTo>
+                  <a:lnTo>
+                    <a:pt x="4301777" y="205861"/>
+                  </a:lnTo>
+                  <a:lnTo>
+                    <a:pt x="4301777" y="205861"/>
+                  </a:lnTo>
+                  <a:lnTo>
+                    <a:pt x="4386125" y="205861"/>
+                  </a:lnTo>
+                  <a:lnTo>
+                    <a:pt x="4386125" y="188562"/>
+                  </a:lnTo>
+                  <a:lnTo>
+                    <a:pt x="4470474" y="188562"/>
+                  </a:lnTo>
+                  <a:lnTo>
+                    <a:pt x="4470474" y="188562"/>
+                  </a:lnTo>
+                  <a:lnTo>
+                    <a:pt x="4554823" y="188562"/>
+                  </a:lnTo>
+                  <a:lnTo>
+                    <a:pt x="4554823" y="171318"/>
+                  </a:lnTo>
+                  <a:lnTo>
+                    <a:pt x="4639171" y="171318"/>
+                  </a:lnTo>
+                  <a:lnTo>
+                    <a:pt x="4639171" y="171318"/>
+                  </a:lnTo>
+                  <a:lnTo>
+                    <a:pt x="4723520" y="171318"/>
+                  </a:lnTo>
+                  <a:lnTo>
+                    <a:pt x="4723520" y="171318"/>
+                  </a:lnTo>
+                  <a:lnTo>
+                    <a:pt x="4807868" y="171318"/>
+                  </a:lnTo>
+                  <a:lnTo>
+                    <a:pt x="4807868" y="171318"/>
+                  </a:lnTo>
+                  <a:lnTo>
+                    <a:pt x="4892217" y="171318"/>
+                  </a:lnTo>
+                  <a:lnTo>
+                    <a:pt x="4892217" y="171318"/>
+                  </a:lnTo>
+                  <a:lnTo>
+                    <a:pt x="4976565" y="171318"/>
+                  </a:lnTo>
+                  <a:lnTo>
+                    <a:pt x="4976565" y="154103"/>
+                  </a:lnTo>
+                  <a:lnTo>
+                    <a:pt x="5060914" y="154103"/>
+                  </a:lnTo>
+                  <a:lnTo>
+                    <a:pt x="5060914" y="119973"/>
+                  </a:lnTo>
+                  <a:lnTo>
+                    <a:pt x="5145263" y="119973"/>
+                  </a:lnTo>
+                  <a:lnTo>
+                    <a:pt x="5145263" y="119973"/>
+                  </a:lnTo>
+                  <a:lnTo>
+                    <a:pt x="5229611" y="119973"/>
+                  </a:lnTo>
+                  <a:lnTo>
+                    <a:pt x="5229611" y="119973"/>
+                  </a:lnTo>
+                  <a:lnTo>
+                    <a:pt x="5313960" y="119973"/>
+                  </a:lnTo>
+                  <a:lnTo>
+                    <a:pt x="5313960" y="119973"/>
+                  </a:lnTo>
+                  <a:lnTo>
+                    <a:pt x="5398308" y="119973"/>
+                  </a:lnTo>
+                  <a:lnTo>
+                    <a:pt x="5398308" y="102926"/>
+                  </a:lnTo>
+                  <a:lnTo>
+                    <a:pt x="5482657" y="102926"/>
+                  </a:lnTo>
+                  <a:lnTo>
+                    <a:pt x="5482657" y="85964"/>
+                  </a:lnTo>
+                  <a:lnTo>
+                    <a:pt x="5567006" y="85964"/>
+                  </a:lnTo>
+                  <a:lnTo>
+                    <a:pt x="5567006" y="85964"/>
+                  </a:lnTo>
+                  <a:lnTo>
+                    <a:pt x="5651354" y="85964"/>
+                  </a:lnTo>
+                  <a:lnTo>
+                    <a:pt x="5651354" y="85964"/>
+                  </a:lnTo>
+                  <a:lnTo>
+                    <a:pt x="5735703" y="85964"/>
+                  </a:lnTo>
+                  <a:lnTo>
+                    <a:pt x="5735703" y="68979"/>
+                  </a:lnTo>
+                  <a:lnTo>
+                    <a:pt x="5820051" y="68979"/>
+                  </a:lnTo>
+                  <a:lnTo>
+                    <a:pt x="5820051" y="68979"/>
+                  </a:lnTo>
+                  <a:lnTo>
+                    <a:pt x="5904400" y="68979"/>
+                  </a:lnTo>
+                  <a:lnTo>
+                    <a:pt x="5904400" y="68979"/>
+                  </a:lnTo>
+                  <a:lnTo>
+                    <a:pt x="5988748" y="68979"/>
+                  </a:lnTo>
+                  <a:lnTo>
+                    <a:pt x="5988748" y="68979"/>
+                  </a:lnTo>
+                  <a:lnTo>
+                    <a:pt x="6073097" y="68979"/>
+                  </a:lnTo>
+                  <a:lnTo>
+                    <a:pt x="6073097" y="68979"/>
+                  </a:lnTo>
+                  <a:lnTo>
+                    <a:pt x="6157446" y="68979"/>
+                  </a:lnTo>
+                  <a:lnTo>
+                    <a:pt x="6157446" y="34503"/>
+                  </a:lnTo>
+                  <a:lnTo>
+                    <a:pt x="6241794" y="34503"/>
+                  </a:lnTo>
+                  <a:lnTo>
+                    <a:pt x="6241794" y="34503"/>
+                  </a:lnTo>
+                  <a:lnTo>
+                    <a:pt x="6326143" y="34503"/>
+                  </a:lnTo>
+                  <a:lnTo>
+                    <a:pt x="6326143" y="34503"/>
+                  </a:lnTo>
+                  <a:lnTo>
+                    <a:pt x="6410491" y="34503"/>
+                  </a:lnTo>
+                  <a:lnTo>
+                    <a:pt x="6410491" y="34503"/>
+                  </a:lnTo>
+                  <a:lnTo>
+                    <a:pt x="6494840" y="34503"/>
+                  </a:lnTo>
+                  <a:lnTo>
+                    <a:pt x="6494840" y="34503"/>
+                  </a:lnTo>
+                  <a:lnTo>
+                    <a:pt x="6579188" y="34503"/>
+                  </a:lnTo>
+                  <a:lnTo>
+                    <a:pt x="6579188" y="34503"/>
+                  </a:lnTo>
+                  <a:lnTo>
+                    <a:pt x="6663537" y="34503"/>
+                  </a:lnTo>
+                  <a:lnTo>
+                    <a:pt x="6663537" y="34503"/>
+                  </a:lnTo>
+                  <a:lnTo>
+                    <a:pt x="6747886" y="34503"/>
+                  </a:lnTo>
+                  <a:lnTo>
+                    <a:pt x="6747886" y="17212"/>
+                  </a:lnTo>
+                  <a:lnTo>
+                    <a:pt x="6832234" y="17212"/>
+                  </a:lnTo>
+                  <a:lnTo>
+                    <a:pt x="6832234" y="17212"/>
+                  </a:lnTo>
+                  <a:lnTo>
+                    <a:pt x="6916583" y="17212"/>
+                  </a:lnTo>
+                  <a:lnTo>
+                    <a:pt x="6916583" y="17212"/>
+                  </a:lnTo>
+                  <a:lnTo>
+                    <a:pt x="7000931" y="17212"/>
+                  </a:lnTo>
+                  <a:lnTo>
+                    <a:pt x="7000931" y="17212"/>
+                  </a:lnTo>
+                  <a:lnTo>
+                    <a:pt x="7085280" y="17212"/>
+                  </a:lnTo>
+                  <a:lnTo>
+                    <a:pt x="7085280" y="17212"/>
+                  </a:lnTo>
+                  <a:lnTo>
+                    <a:pt x="7169628" y="17212"/>
+                  </a:lnTo>
+                  <a:lnTo>
+                    <a:pt x="7169628" y="17212"/>
+                  </a:lnTo>
+                  <a:lnTo>
+                    <a:pt x="7253977" y="17212"/>
                   </a:lnTo>
                   <a:lnTo>
                     <a:pt x="7253977" y="0"/>
@@ -3531,528 +3531,528 @@
           </p:nvSpPr>
           <p:spPr>
             <a:xfrm>
-              <a:off x="1019512" y="3266247"/>
-              <a:ext cx="7591371" cy="1798648"/>
+              <a:off x="1019512" y="3772121"/>
+              <a:ext cx="7591371" cy="1292774"/>
             </a:xfrm>
             <a:custGeom>
               <a:avLst/>
               <a:pathLst>
-                <a:path w="7591371" h="1798648">
+                <a:path w="7591371" h="1292774">
                   <a:moveTo>
-                    <a:pt x="0" y="1798648"/>
+                    <a:pt x="0" y="1292774"/>
                   </a:moveTo>
                   <a:lnTo>
-                    <a:pt x="84348" y="1798648"/>
-                  </a:lnTo>
-                  <a:lnTo>
-                    <a:pt x="84348" y="1760698"/>
-                  </a:lnTo>
-                  <a:lnTo>
-                    <a:pt x="168697" y="1760698"/>
-                  </a:lnTo>
-                  <a:lnTo>
-                    <a:pt x="168697" y="1722873"/>
-                  </a:lnTo>
-                  <a:lnTo>
-                    <a:pt x="253045" y="1722873"/>
-                  </a:lnTo>
-                  <a:lnTo>
-                    <a:pt x="253045" y="1685054"/>
-                  </a:lnTo>
-                  <a:lnTo>
-                    <a:pt x="337394" y="1685054"/>
-                  </a:lnTo>
-                  <a:lnTo>
-                    <a:pt x="337394" y="1666025"/>
-                  </a:lnTo>
-                  <a:lnTo>
-                    <a:pt x="421742" y="1666025"/>
-                  </a:lnTo>
-                  <a:lnTo>
-                    <a:pt x="421742" y="1628173"/>
-                  </a:lnTo>
-                  <a:lnTo>
-                    <a:pt x="506091" y="1628173"/>
-                  </a:lnTo>
-                  <a:lnTo>
-                    <a:pt x="506091" y="1590478"/>
-                  </a:lnTo>
-                  <a:lnTo>
-                    <a:pt x="590440" y="1590478"/>
-                  </a:lnTo>
-                  <a:lnTo>
-                    <a:pt x="590440" y="1534300"/>
-                  </a:lnTo>
-                  <a:lnTo>
-                    <a:pt x="674788" y="1534300"/>
-                  </a:lnTo>
-                  <a:lnTo>
-                    <a:pt x="674788" y="1515462"/>
-                  </a:lnTo>
-                  <a:lnTo>
-                    <a:pt x="759137" y="1515462"/>
-                  </a:lnTo>
-                  <a:lnTo>
-                    <a:pt x="759137" y="1422725"/>
-                  </a:lnTo>
-                  <a:lnTo>
-                    <a:pt x="843485" y="1422725"/>
-                  </a:lnTo>
-                  <a:lnTo>
-                    <a:pt x="843485" y="1366805"/>
-                  </a:lnTo>
-                  <a:lnTo>
-                    <a:pt x="927834" y="1366805"/>
-                  </a:lnTo>
-                  <a:lnTo>
-                    <a:pt x="927834" y="1292659"/>
-                  </a:lnTo>
-                  <a:lnTo>
-                    <a:pt x="1012182" y="1292659"/>
-                  </a:lnTo>
-                  <a:lnTo>
-                    <a:pt x="1012182" y="1165033"/>
-                  </a:lnTo>
-                  <a:lnTo>
-                    <a:pt x="1096531" y="1165033"/>
-                  </a:lnTo>
-                  <a:lnTo>
-                    <a:pt x="1096531" y="1109484"/>
-                  </a:lnTo>
-                  <a:lnTo>
-                    <a:pt x="1180880" y="1109484"/>
-                  </a:lnTo>
-                  <a:lnTo>
-                    <a:pt x="1180880" y="1072197"/>
-                  </a:lnTo>
-                  <a:lnTo>
-                    <a:pt x="1265228" y="1072197"/>
-                  </a:lnTo>
-                  <a:lnTo>
-                    <a:pt x="1265228" y="1016784"/>
-                  </a:lnTo>
-                  <a:lnTo>
-                    <a:pt x="1349577" y="1016784"/>
-                  </a:lnTo>
-                  <a:lnTo>
-                    <a:pt x="1349577" y="979654"/>
-                  </a:lnTo>
-                  <a:lnTo>
-                    <a:pt x="1433925" y="979654"/>
-                  </a:lnTo>
-                  <a:lnTo>
-                    <a:pt x="1433925" y="942642"/>
-                  </a:lnTo>
-                  <a:lnTo>
-                    <a:pt x="1518274" y="942642"/>
-                  </a:lnTo>
-                  <a:lnTo>
-                    <a:pt x="1518274" y="869403"/>
-                  </a:lnTo>
-                  <a:lnTo>
-                    <a:pt x="1602622" y="869403"/>
-                  </a:lnTo>
-                  <a:lnTo>
-                    <a:pt x="1602622" y="850927"/>
-                  </a:lnTo>
-                  <a:lnTo>
-                    <a:pt x="1686971" y="850927"/>
-                  </a:lnTo>
-                  <a:lnTo>
-                    <a:pt x="1686971" y="832522"/>
-                  </a:lnTo>
-                  <a:lnTo>
-                    <a:pt x="1771320" y="832522"/>
-                  </a:lnTo>
-                  <a:lnTo>
-                    <a:pt x="1771320" y="832522"/>
-                  </a:lnTo>
-                  <a:lnTo>
-                    <a:pt x="1855668" y="832522"/>
-                  </a:lnTo>
-                  <a:lnTo>
-                    <a:pt x="1855668" y="758905"/>
-                  </a:lnTo>
-                  <a:lnTo>
-                    <a:pt x="1940017" y="758905"/>
-                  </a:lnTo>
-                  <a:lnTo>
-                    <a:pt x="1940017" y="758905"/>
-                  </a:lnTo>
-                  <a:lnTo>
-                    <a:pt x="2024365" y="758905"/>
-                  </a:lnTo>
-                  <a:lnTo>
-                    <a:pt x="2024365" y="740453"/>
-                  </a:lnTo>
-                  <a:lnTo>
-                    <a:pt x="2108714" y="740453"/>
-                  </a:lnTo>
-                  <a:lnTo>
-                    <a:pt x="2108714" y="703778"/>
-                  </a:lnTo>
-                  <a:lnTo>
-                    <a:pt x="2193062" y="703778"/>
-                  </a:lnTo>
-                  <a:lnTo>
-                    <a:pt x="2193062" y="631528"/>
-                  </a:lnTo>
-                  <a:lnTo>
-                    <a:pt x="2277411" y="631528"/>
-                  </a:lnTo>
-                  <a:lnTo>
-                    <a:pt x="2277411" y="613306"/>
-                  </a:lnTo>
-                  <a:lnTo>
-                    <a:pt x="2361760" y="613306"/>
-                  </a:lnTo>
-                  <a:lnTo>
-                    <a:pt x="2361760" y="541321"/>
-                  </a:lnTo>
-                  <a:lnTo>
-                    <a:pt x="2446108" y="541321"/>
-                  </a:lnTo>
-                  <a:lnTo>
-                    <a:pt x="2446108" y="487465"/>
-                  </a:lnTo>
-                  <a:lnTo>
-                    <a:pt x="2530457" y="487465"/>
-                  </a:lnTo>
-                  <a:lnTo>
-                    <a:pt x="2530457" y="434098"/>
-                  </a:lnTo>
-                  <a:lnTo>
-                    <a:pt x="2614805" y="434098"/>
-                  </a:lnTo>
-                  <a:lnTo>
-                    <a:pt x="2614805" y="416176"/>
-                  </a:lnTo>
-                  <a:lnTo>
-                    <a:pt x="2699154" y="416176"/>
-                  </a:lnTo>
-                  <a:lnTo>
-                    <a:pt x="2699154" y="416176"/>
-                  </a:lnTo>
-                  <a:lnTo>
-                    <a:pt x="2783503" y="416176"/>
-                  </a:lnTo>
-                  <a:lnTo>
-                    <a:pt x="2783503" y="416176"/>
-                  </a:lnTo>
-                  <a:lnTo>
-                    <a:pt x="2867851" y="416176"/>
-                  </a:lnTo>
-                  <a:lnTo>
-                    <a:pt x="2867851" y="363120"/>
-                  </a:lnTo>
-                  <a:lnTo>
-                    <a:pt x="2952200" y="363120"/>
-                  </a:lnTo>
-                  <a:lnTo>
-                    <a:pt x="2952200" y="327843"/>
-                  </a:lnTo>
-                  <a:lnTo>
-                    <a:pt x="3036548" y="327843"/>
-                  </a:lnTo>
-                  <a:lnTo>
-                    <a:pt x="3036548" y="327843"/>
-                  </a:lnTo>
-                  <a:lnTo>
-                    <a:pt x="3120897" y="327843"/>
-                  </a:lnTo>
-                  <a:lnTo>
-                    <a:pt x="3120897" y="310243"/>
-                  </a:lnTo>
-                  <a:lnTo>
-                    <a:pt x="3205245" y="310243"/>
-                  </a:lnTo>
-                  <a:lnTo>
-                    <a:pt x="3205245" y="292708"/>
-                  </a:lnTo>
-                  <a:lnTo>
-                    <a:pt x="3289594" y="292708"/>
-                  </a:lnTo>
-                  <a:lnTo>
-                    <a:pt x="3289594" y="292708"/>
-                  </a:lnTo>
-                  <a:lnTo>
-                    <a:pt x="3373943" y="292708"/>
-                  </a:lnTo>
-                  <a:lnTo>
-                    <a:pt x="3373943" y="292708"/>
-                  </a:lnTo>
-                  <a:lnTo>
-                    <a:pt x="3458291" y="292708"/>
-                  </a:lnTo>
-                  <a:lnTo>
-                    <a:pt x="3458291" y="292708"/>
-                  </a:lnTo>
-                  <a:lnTo>
-                    <a:pt x="3542640" y="292708"/>
-                  </a:lnTo>
-                  <a:lnTo>
-                    <a:pt x="3542640" y="292708"/>
-                  </a:lnTo>
-                  <a:lnTo>
-                    <a:pt x="3626988" y="292708"/>
-                  </a:lnTo>
-                  <a:lnTo>
-                    <a:pt x="3626988" y="292708"/>
-                  </a:lnTo>
-                  <a:lnTo>
-                    <a:pt x="3711337" y="292708"/>
-                  </a:lnTo>
-                  <a:lnTo>
-                    <a:pt x="3711337" y="292708"/>
-                  </a:lnTo>
-                  <a:lnTo>
-                    <a:pt x="3795685" y="292708"/>
-                  </a:lnTo>
-                  <a:lnTo>
-                    <a:pt x="3795685" y="275230"/>
-                  </a:lnTo>
-                  <a:lnTo>
-                    <a:pt x="3880034" y="275230"/>
-                  </a:lnTo>
-                  <a:lnTo>
-                    <a:pt x="3880034" y="275230"/>
-                  </a:lnTo>
-                  <a:lnTo>
-                    <a:pt x="3964383" y="275230"/>
-                  </a:lnTo>
-                  <a:lnTo>
-                    <a:pt x="3964383" y="257781"/>
-                  </a:lnTo>
-                  <a:lnTo>
-                    <a:pt x="4048731" y="257781"/>
-                  </a:lnTo>
-                  <a:lnTo>
-                    <a:pt x="4048731" y="240355"/>
-                  </a:lnTo>
-                  <a:lnTo>
-                    <a:pt x="4133080" y="240355"/>
-                  </a:lnTo>
-                  <a:lnTo>
-                    <a:pt x="4133080" y="205861"/>
-                  </a:lnTo>
-                  <a:lnTo>
-                    <a:pt x="4217428" y="205861"/>
-                  </a:lnTo>
-                  <a:lnTo>
-                    <a:pt x="4217428" y="205861"/>
-                  </a:lnTo>
-                  <a:lnTo>
-                    <a:pt x="4301777" y="205861"/>
-                  </a:lnTo>
-                  <a:lnTo>
-                    <a:pt x="4301777" y="205861"/>
-                  </a:lnTo>
-                  <a:lnTo>
-                    <a:pt x="4386125" y="205861"/>
-                  </a:lnTo>
-                  <a:lnTo>
-                    <a:pt x="4386125" y="188562"/>
-                  </a:lnTo>
-                  <a:lnTo>
-                    <a:pt x="4470474" y="188562"/>
-                  </a:lnTo>
-                  <a:lnTo>
-                    <a:pt x="4470474" y="188562"/>
-                  </a:lnTo>
-                  <a:lnTo>
-                    <a:pt x="4554823" y="188562"/>
-                  </a:lnTo>
-                  <a:lnTo>
-                    <a:pt x="4554823" y="171318"/>
-                  </a:lnTo>
-                  <a:lnTo>
-                    <a:pt x="4639171" y="171318"/>
-                  </a:lnTo>
-                  <a:lnTo>
-                    <a:pt x="4639171" y="171318"/>
-                  </a:lnTo>
-                  <a:lnTo>
-                    <a:pt x="4723520" y="171318"/>
-                  </a:lnTo>
-                  <a:lnTo>
-                    <a:pt x="4723520" y="171318"/>
-                  </a:lnTo>
-                  <a:lnTo>
-                    <a:pt x="4807868" y="171318"/>
-                  </a:lnTo>
-                  <a:lnTo>
-                    <a:pt x="4807868" y="171318"/>
-                  </a:lnTo>
-                  <a:lnTo>
-                    <a:pt x="4892217" y="171318"/>
-                  </a:lnTo>
-                  <a:lnTo>
-                    <a:pt x="4892217" y="171318"/>
-                  </a:lnTo>
-                  <a:lnTo>
-                    <a:pt x="4976565" y="171318"/>
-                  </a:lnTo>
-                  <a:lnTo>
-                    <a:pt x="4976565" y="154103"/>
-                  </a:lnTo>
-                  <a:lnTo>
-                    <a:pt x="5060914" y="154103"/>
-                  </a:lnTo>
-                  <a:lnTo>
-                    <a:pt x="5060914" y="119973"/>
-                  </a:lnTo>
-                  <a:lnTo>
-                    <a:pt x="5145263" y="119973"/>
-                  </a:lnTo>
-                  <a:lnTo>
-                    <a:pt x="5145263" y="119973"/>
-                  </a:lnTo>
-                  <a:lnTo>
-                    <a:pt x="5229611" y="119973"/>
-                  </a:lnTo>
-                  <a:lnTo>
-                    <a:pt x="5229611" y="119973"/>
-                  </a:lnTo>
-                  <a:lnTo>
-                    <a:pt x="5313960" y="119973"/>
-                  </a:lnTo>
-                  <a:lnTo>
-                    <a:pt x="5313960" y="119973"/>
-                  </a:lnTo>
-                  <a:lnTo>
-                    <a:pt x="5398308" y="119973"/>
-                  </a:lnTo>
-                  <a:lnTo>
-                    <a:pt x="5398308" y="102926"/>
-                  </a:lnTo>
-                  <a:lnTo>
-                    <a:pt x="5482657" y="102926"/>
-                  </a:lnTo>
-                  <a:lnTo>
-                    <a:pt x="5482657" y="85964"/>
-                  </a:lnTo>
-                  <a:lnTo>
-                    <a:pt x="5567006" y="85964"/>
-                  </a:lnTo>
-                  <a:lnTo>
-                    <a:pt x="5567006" y="85964"/>
-                  </a:lnTo>
-                  <a:lnTo>
-                    <a:pt x="5651354" y="85964"/>
-                  </a:lnTo>
-                  <a:lnTo>
-                    <a:pt x="5651354" y="85964"/>
-                  </a:lnTo>
-                  <a:lnTo>
-                    <a:pt x="5735703" y="85964"/>
-                  </a:lnTo>
-                  <a:lnTo>
-                    <a:pt x="5735703" y="68979"/>
-                  </a:lnTo>
-                  <a:lnTo>
-                    <a:pt x="5820051" y="68979"/>
-                  </a:lnTo>
-                  <a:lnTo>
-                    <a:pt x="5820051" y="68979"/>
-                  </a:lnTo>
-                  <a:lnTo>
-                    <a:pt x="5904400" y="68979"/>
-                  </a:lnTo>
-                  <a:lnTo>
-                    <a:pt x="5904400" y="68979"/>
-                  </a:lnTo>
-                  <a:lnTo>
-                    <a:pt x="5988748" y="68979"/>
-                  </a:lnTo>
-                  <a:lnTo>
-                    <a:pt x="5988748" y="68979"/>
-                  </a:lnTo>
-                  <a:lnTo>
-                    <a:pt x="6073097" y="68979"/>
-                  </a:lnTo>
-                  <a:lnTo>
-                    <a:pt x="6073097" y="68979"/>
-                  </a:lnTo>
-                  <a:lnTo>
-                    <a:pt x="6157446" y="68979"/>
-                  </a:lnTo>
-                  <a:lnTo>
-                    <a:pt x="6157446" y="34503"/>
-                  </a:lnTo>
-                  <a:lnTo>
-                    <a:pt x="6241794" y="34503"/>
-                  </a:lnTo>
-                  <a:lnTo>
-                    <a:pt x="6241794" y="34503"/>
-                  </a:lnTo>
-                  <a:lnTo>
-                    <a:pt x="6326143" y="34503"/>
-                  </a:lnTo>
-                  <a:lnTo>
-                    <a:pt x="6326143" y="34503"/>
-                  </a:lnTo>
-                  <a:lnTo>
-                    <a:pt x="6410491" y="34503"/>
-                  </a:lnTo>
-                  <a:lnTo>
-                    <a:pt x="6410491" y="34503"/>
-                  </a:lnTo>
-                  <a:lnTo>
-                    <a:pt x="6494840" y="34503"/>
-                  </a:lnTo>
-                  <a:lnTo>
-                    <a:pt x="6494840" y="34503"/>
-                  </a:lnTo>
-                  <a:lnTo>
-                    <a:pt x="6579188" y="34503"/>
-                  </a:lnTo>
-                  <a:lnTo>
-                    <a:pt x="6579188" y="34503"/>
-                  </a:lnTo>
-                  <a:lnTo>
-                    <a:pt x="6663537" y="34503"/>
-                  </a:lnTo>
-                  <a:lnTo>
-                    <a:pt x="6663537" y="34503"/>
-                  </a:lnTo>
-                  <a:lnTo>
-                    <a:pt x="6747886" y="34503"/>
-                  </a:lnTo>
-                  <a:lnTo>
-                    <a:pt x="6747886" y="17212"/>
-                  </a:lnTo>
-                  <a:lnTo>
-                    <a:pt x="6832234" y="17212"/>
-                  </a:lnTo>
-                  <a:lnTo>
-                    <a:pt x="6832234" y="17212"/>
-                  </a:lnTo>
-                  <a:lnTo>
-                    <a:pt x="6916583" y="17212"/>
-                  </a:lnTo>
-                  <a:lnTo>
-                    <a:pt x="6916583" y="17212"/>
-                  </a:lnTo>
-                  <a:lnTo>
-                    <a:pt x="7000931" y="17212"/>
-                  </a:lnTo>
-                  <a:lnTo>
-                    <a:pt x="7000931" y="17212"/>
-                  </a:lnTo>
-                  <a:lnTo>
-                    <a:pt x="7085280" y="17212"/>
-                  </a:lnTo>
-                  <a:lnTo>
-                    <a:pt x="7085280" y="17212"/>
-                  </a:lnTo>
-                  <a:lnTo>
-                    <a:pt x="7169628" y="17212"/>
-                  </a:lnTo>
-                  <a:lnTo>
-                    <a:pt x="7169628" y="17212"/>
-                  </a:lnTo>
-                  <a:lnTo>
-                    <a:pt x="7253977" y="17212"/>
+                    <a:pt x="84348" y="1292774"/>
+                  </a:lnTo>
+                  <a:lnTo>
+                    <a:pt x="84348" y="1268712"/>
+                  </a:lnTo>
+                  <a:lnTo>
+                    <a:pt x="168697" y="1268712"/>
+                  </a:lnTo>
+                  <a:lnTo>
+                    <a:pt x="168697" y="1244627"/>
+                  </a:lnTo>
+                  <a:lnTo>
+                    <a:pt x="253045" y="1244627"/>
+                  </a:lnTo>
+                  <a:lnTo>
+                    <a:pt x="253045" y="1220444"/>
+                  </a:lnTo>
+                  <a:lnTo>
+                    <a:pt x="337394" y="1220444"/>
+                  </a:lnTo>
+                  <a:lnTo>
+                    <a:pt x="337394" y="1208236"/>
+                  </a:lnTo>
+                  <a:lnTo>
+                    <a:pt x="421742" y="1208236"/>
+                  </a:lnTo>
+                  <a:lnTo>
+                    <a:pt x="421742" y="1183874"/>
+                  </a:lnTo>
+                  <a:lnTo>
+                    <a:pt x="506091" y="1183874"/>
+                  </a:lnTo>
+                  <a:lnTo>
+                    <a:pt x="506091" y="1159506"/>
+                  </a:lnTo>
+                  <a:lnTo>
+                    <a:pt x="590440" y="1159506"/>
+                  </a:lnTo>
+                  <a:lnTo>
+                    <a:pt x="590440" y="1122988"/>
+                  </a:lnTo>
+                  <a:lnTo>
+                    <a:pt x="674788" y="1122988"/>
+                  </a:lnTo>
+                  <a:lnTo>
+                    <a:pt x="674788" y="1110688"/>
+                  </a:lnTo>
+                  <a:lnTo>
+                    <a:pt x="759137" y="1110688"/>
+                  </a:lnTo>
+                  <a:lnTo>
+                    <a:pt x="759137" y="1049724"/>
+                  </a:lnTo>
+                  <a:lnTo>
+                    <a:pt x="843485" y="1049724"/>
+                  </a:lnTo>
+                  <a:lnTo>
+                    <a:pt x="843485" y="1012623"/>
+                  </a:lnTo>
+                  <a:lnTo>
+                    <a:pt x="927834" y="1012623"/>
+                  </a:lnTo>
+                  <a:lnTo>
+                    <a:pt x="927834" y="963023"/>
+                  </a:lnTo>
+                  <a:lnTo>
+                    <a:pt x="1012182" y="963023"/>
+                  </a:lnTo>
+                  <a:lnTo>
+                    <a:pt x="1012182" y="876513"/>
+                  </a:lnTo>
+                  <a:lnTo>
+                    <a:pt x="1096531" y="876513"/>
+                  </a:lnTo>
+                  <a:lnTo>
+                    <a:pt x="1096531" y="838393"/>
+                  </a:lnTo>
+                  <a:lnTo>
+                    <a:pt x="1180880" y="838393"/>
+                  </a:lnTo>
+                  <a:lnTo>
+                    <a:pt x="1180880" y="812639"/>
+                  </a:lnTo>
+                  <a:lnTo>
+                    <a:pt x="1265228" y="812639"/>
+                  </a:lnTo>
+                  <a:lnTo>
+                    <a:pt x="1265228" y="774115"/>
+                  </a:lnTo>
+                  <a:lnTo>
+                    <a:pt x="1349577" y="774115"/>
+                  </a:lnTo>
+                  <a:lnTo>
+                    <a:pt x="1349577" y="748130"/>
+                  </a:lnTo>
+                  <a:lnTo>
+                    <a:pt x="1433925" y="748130"/>
+                  </a:lnTo>
+                  <a:lnTo>
+                    <a:pt x="1433925" y="722086"/>
+                  </a:lnTo>
+                  <a:lnTo>
+                    <a:pt x="1518274" y="722086"/>
+                  </a:lnTo>
+                  <a:lnTo>
+                    <a:pt x="1518274" y="670126"/>
+                  </a:lnTo>
+                  <a:lnTo>
+                    <a:pt x="1602622" y="670126"/>
+                  </a:lnTo>
+                  <a:lnTo>
+                    <a:pt x="1602622" y="656926"/>
+                  </a:lnTo>
+                  <a:lnTo>
+                    <a:pt x="1686971" y="656926"/>
+                  </a:lnTo>
+                  <a:lnTo>
+                    <a:pt x="1686971" y="643741"/>
+                  </a:lnTo>
+                  <a:lnTo>
+                    <a:pt x="1771320" y="643741"/>
+                  </a:lnTo>
+                  <a:lnTo>
+                    <a:pt x="1771320" y="643741"/>
+                  </a:lnTo>
+                  <a:lnTo>
+                    <a:pt x="1855668" y="643741"/>
+                  </a:lnTo>
+                  <a:lnTo>
+                    <a:pt x="1855668" y="590618"/>
+                  </a:lnTo>
+                  <a:lnTo>
+                    <a:pt x="1940017" y="590618"/>
+                  </a:lnTo>
+                  <a:lnTo>
+                    <a:pt x="1940017" y="590618"/>
+                  </a:lnTo>
+                  <a:lnTo>
+                    <a:pt x="2024365" y="590618"/>
+                  </a:lnTo>
+                  <a:lnTo>
+                    <a:pt x="2024365" y="577206"/>
+                  </a:lnTo>
+                  <a:lnTo>
+                    <a:pt x="2108714" y="577206"/>
+                  </a:lnTo>
+                  <a:lnTo>
+                    <a:pt x="2108714" y="550427"/>
+                  </a:lnTo>
+                  <a:lnTo>
+                    <a:pt x="2193062" y="550427"/>
+                  </a:lnTo>
+                  <a:lnTo>
+                    <a:pt x="2193062" y="497198"/>
+                  </a:lnTo>
+                  <a:lnTo>
+                    <a:pt x="2277411" y="497198"/>
+                  </a:lnTo>
+                  <a:lnTo>
+                    <a:pt x="2277411" y="483670"/>
+                  </a:lnTo>
+                  <a:lnTo>
+                    <a:pt x="2361760" y="483670"/>
+                  </a:lnTo>
+                  <a:lnTo>
+                    <a:pt x="2361760" y="429814"/>
+                  </a:lnTo>
+                  <a:lnTo>
+                    <a:pt x="2446108" y="429814"/>
+                  </a:lnTo>
+                  <a:lnTo>
+                    <a:pt x="2446108" y="389071"/>
+                  </a:lnTo>
+                  <a:lnTo>
+                    <a:pt x="2530457" y="389071"/>
+                  </a:lnTo>
+                  <a:lnTo>
+                    <a:pt x="2530457" y="348303"/>
+                  </a:lnTo>
+                  <a:lnTo>
+                    <a:pt x="2614805" y="348303"/>
+                  </a:lnTo>
+                  <a:lnTo>
+                    <a:pt x="2614805" y="334522"/>
+                  </a:lnTo>
+                  <a:lnTo>
+                    <a:pt x="2699154" y="334522"/>
+                  </a:lnTo>
+                  <a:lnTo>
+                    <a:pt x="2699154" y="334522"/>
+                  </a:lnTo>
+                  <a:lnTo>
+                    <a:pt x="2783503" y="334522"/>
+                  </a:lnTo>
+                  <a:lnTo>
+                    <a:pt x="2783503" y="334522"/>
+                  </a:lnTo>
+                  <a:lnTo>
+                    <a:pt x="2867851" y="334522"/>
+                  </a:lnTo>
+                  <a:lnTo>
+                    <a:pt x="2867851" y="293448"/>
+                  </a:lnTo>
+                  <a:lnTo>
+                    <a:pt x="2952200" y="293448"/>
+                  </a:lnTo>
+                  <a:lnTo>
+                    <a:pt x="2952200" y="265904"/>
+                  </a:lnTo>
+                  <a:lnTo>
+                    <a:pt x="3036548" y="265904"/>
+                  </a:lnTo>
+                  <a:lnTo>
+                    <a:pt x="3036548" y="265904"/>
+                  </a:lnTo>
+                  <a:lnTo>
+                    <a:pt x="3120897" y="265904"/>
+                  </a:lnTo>
+                  <a:lnTo>
+                    <a:pt x="3120897" y="252091"/>
+                  </a:lnTo>
+                  <a:lnTo>
+                    <a:pt x="3205245" y="252091"/>
+                  </a:lnTo>
+                  <a:lnTo>
+                    <a:pt x="3205245" y="238280"/>
+                  </a:lnTo>
+                  <a:lnTo>
+                    <a:pt x="3289594" y="238280"/>
+                  </a:lnTo>
+                  <a:lnTo>
+                    <a:pt x="3289594" y="238280"/>
+                  </a:lnTo>
+                  <a:lnTo>
+                    <a:pt x="3373943" y="238280"/>
+                  </a:lnTo>
+                  <a:lnTo>
+                    <a:pt x="3373943" y="238280"/>
+                  </a:lnTo>
+                  <a:lnTo>
+                    <a:pt x="3458291" y="238280"/>
+                  </a:lnTo>
+                  <a:lnTo>
+                    <a:pt x="3458291" y="238280"/>
+                  </a:lnTo>
+                  <a:lnTo>
+                    <a:pt x="3542640" y="238280"/>
+                  </a:lnTo>
+                  <a:lnTo>
+                    <a:pt x="3542640" y="238280"/>
+                  </a:lnTo>
+                  <a:lnTo>
+                    <a:pt x="3626988" y="238280"/>
+                  </a:lnTo>
+                  <a:lnTo>
+                    <a:pt x="3626988" y="238280"/>
+                  </a:lnTo>
+                  <a:lnTo>
+                    <a:pt x="3711337" y="238280"/>
+                  </a:lnTo>
+                  <a:lnTo>
+                    <a:pt x="3711337" y="238280"/>
+                  </a:lnTo>
+                  <a:lnTo>
+                    <a:pt x="3795685" y="238280"/>
+                  </a:lnTo>
+                  <a:lnTo>
+                    <a:pt x="3795685" y="224466"/>
+                  </a:lnTo>
+                  <a:lnTo>
+                    <a:pt x="3880034" y="224466"/>
+                  </a:lnTo>
+                  <a:lnTo>
+                    <a:pt x="3880034" y="224466"/>
+                  </a:lnTo>
+                  <a:lnTo>
+                    <a:pt x="3964383" y="224466"/>
+                  </a:lnTo>
+                  <a:lnTo>
+                    <a:pt x="3964383" y="210627"/>
+                  </a:lnTo>
+                  <a:lnTo>
+                    <a:pt x="4048731" y="210627"/>
+                  </a:lnTo>
+                  <a:lnTo>
+                    <a:pt x="4048731" y="196755"/>
+                  </a:lnTo>
+                  <a:lnTo>
+                    <a:pt x="4133080" y="196755"/>
+                  </a:lnTo>
+                  <a:lnTo>
+                    <a:pt x="4133080" y="169149"/>
+                  </a:lnTo>
+                  <a:lnTo>
+                    <a:pt x="4217428" y="169149"/>
+                  </a:lnTo>
+                  <a:lnTo>
+                    <a:pt x="4217428" y="169149"/>
+                  </a:lnTo>
+                  <a:lnTo>
+                    <a:pt x="4301777" y="169149"/>
+                  </a:lnTo>
+                  <a:lnTo>
+                    <a:pt x="4301777" y="169149"/>
+                  </a:lnTo>
+                  <a:lnTo>
+                    <a:pt x="4386125" y="169149"/>
+                  </a:lnTo>
+                  <a:lnTo>
+                    <a:pt x="4386125" y="155228"/>
+                  </a:lnTo>
+                  <a:lnTo>
+                    <a:pt x="4470474" y="155228"/>
+                  </a:lnTo>
+                  <a:lnTo>
+                    <a:pt x="4470474" y="155228"/>
+                  </a:lnTo>
+                  <a:lnTo>
+                    <a:pt x="4554823" y="155228"/>
+                  </a:lnTo>
+                  <a:lnTo>
+                    <a:pt x="4554823" y="141301"/>
+                  </a:lnTo>
+                  <a:lnTo>
+                    <a:pt x="4639171" y="141301"/>
+                  </a:lnTo>
+                  <a:lnTo>
+                    <a:pt x="4639171" y="141301"/>
+                  </a:lnTo>
+                  <a:lnTo>
+                    <a:pt x="4723520" y="141301"/>
+                  </a:lnTo>
+                  <a:lnTo>
+                    <a:pt x="4723520" y="141301"/>
+                  </a:lnTo>
+                  <a:lnTo>
+                    <a:pt x="4807868" y="141301"/>
+                  </a:lnTo>
+                  <a:lnTo>
+                    <a:pt x="4807868" y="141301"/>
+                  </a:lnTo>
+                  <a:lnTo>
+                    <a:pt x="4892217" y="141301"/>
+                  </a:lnTo>
+                  <a:lnTo>
+                    <a:pt x="4892217" y="141301"/>
+                  </a:lnTo>
+                  <a:lnTo>
+                    <a:pt x="4976565" y="141301"/>
+                  </a:lnTo>
+                  <a:lnTo>
+                    <a:pt x="4976565" y="127346"/>
+                  </a:lnTo>
+                  <a:lnTo>
+                    <a:pt x="5060914" y="127346"/>
+                  </a:lnTo>
+                  <a:lnTo>
+                    <a:pt x="5060914" y="99523"/>
+                  </a:lnTo>
+                  <a:lnTo>
+                    <a:pt x="5145263" y="99523"/>
+                  </a:lnTo>
+                  <a:lnTo>
+                    <a:pt x="5145263" y="99523"/>
+                  </a:lnTo>
+                  <a:lnTo>
+                    <a:pt x="5229611" y="99523"/>
+                  </a:lnTo>
+                  <a:lnTo>
+                    <a:pt x="5229611" y="99523"/>
+                  </a:lnTo>
+                  <a:lnTo>
+                    <a:pt x="5313960" y="99523"/>
+                  </a:lnTo>
+                  <a:lnTo>
+                    <a:pt x="5313960" y="99523"/>
+                  </a:lnTo>
+                  <a:lnTo>
+                    <a:pt x="5398308" y="99523"/>
+                  </a:lnTo>
+                  <a:lnTo>
+                    <a:pt x="5398308" y="85547"/>
+                  </a:lnTo>
+                  <a:lnTo>
+                    <a:pt x="5482657" y="85547"/>
+                  </a:lnTo>
+                  <a:lnTo>
+                    <a:pt x="5482657" y="71588"/>
+                  </a:lnTo>
+                  <a:lnTo>
+                    <a:pt x="5567006" y="71588"/>
+                  </a:lnTo>
+                  <a:lnTo>
+                    <a:pt x="5567006" y="71588"/>
+                  </a:lnTo>
+                  <a:lnTo>
+                    <a:pt x="5651354" y="71588"/>
+                  </a:lnTo>
+                  <a:lnTo>
+                    <a:pt x="5651354" y="71588"/>
+                  </a:lnTo>
+                  <a:lnTo>
+                    <a:pt x="5735703" y="71588"/>
+                  </a:lnTo>
+                  <a:lnTo>
+                    <a:pt x="5735703" y="57557"/>
+                  </a:lnTo>
+                  <a:lnTo>
+                    <a:pt x="5820051" y="57557"/>
+                  </a:lnTo>
+                  <a:lnTo>
+                    <a:pt x="5820051" y="57557"/>
+                  </a:lnTo>
+                  <a:lnTo>
+                    <a:pt x="5904400" y="57557"/>
+                  </a:lnTo>
+                  <a:lnTo>
+                    <a:pt x="5904400" y="57557"/>
+                  </a:lnTo>
+                  <a:lnTo>
+                    <a:pt x="5988748" y="57557"/>
+                  </a:lnTo>
+                  <a:lnTo>
+                    <a:pt x="5988748" y="57557"/>
+                  </a:lnTo>
+                  <a:lnTo>
+                    <a:pt x="6073097" y="57557"/>
+                  </a:lnTo>
+                  <a:lnTo>
+                    <a:pt x="6073097" y="57557"/>
+                  </a:lnTo>
+                  <a:lnTo>
+                    <a:pt x="6157446" y="57557"/>
+                  </a:lnTo>
+                  <a:lnTo>
+                    <a:pt x="6157446" y="28906"/>
+                  </a:lnTo>
+                  <a:lnTo>
+                    <a:pt x="6241794" y="28906"/>
+                  </a:lnTo>
+                  <a:lnTo>
+                    <a:pt x="6241794" y="28906"/>
+                  </a:lnTo>
+                  <a:lnTo>
+                    <a:pt x="6326143" y="28906"/>
+                  </a:lnTo>
+                  <a:lnTo>
+                    <a:pt x="6326143" y="28906"/>
+                  </a:lnTo>
+                  <a:lnTo>
+                    <a:pt x="6410491" y="28906"/>
+                  </a:lnTo>
+                  <a:lnTo>
+                    <a:pt x="6410491" y="28906"/>
+                  </a:lnTo>
+                  <a:lnTo>
+                    <a:pt x="6494840" y="28906"/>
+                  </a:lnTo>
+                  <a:lnTo>
+                    <a:pt x="6494840" y="28906"/>
+                  </a:lnTo>
+                  <a:lnTo>
+                    <a:pt x="6579188" y="28906"/>
+                  </a:lnTo>
+                  <a:lnTo>
+                    <a:pt x="6579188" y="28906"/>
+                  </a:lnTo>
+                  <a:lnTo>
+                    <a:pt x="6663537" y="28906"/>
+                  </a:lnTo>
+                  <a:lnTo>
+                    <a:pt x="6663537" y="28906"/>
+                  </a:lnTo>
+                  <a:lnTo>
+                    <a:pt x="6747886" y="28906"/>
+                  </a:lnTo>
+                  <a:lnTo>
+                    <a:pt x="6747886" y="14449"/>
+                  </a:lnTo>
+                  <a:lnTo>
+                    <a:pt x="6832234" y="14449"/>
+                  </a:lnTo>
+                  <a:lnTo>
+                    <a:pt x="6832234" y="14449"/>
+                  </a:lnTo>
+                  <a:lnTo>
+                    <a:pt x="6916583" y="14449"/>
+                  </a:lnTo>
+                  <a:lnTo>
+                    <a:pt x="6916583" y="14449"/>
+                  </a:lnTo>
+                  <a:lnTo>
+                    <a:pt x="7000931" y="14449"/>
+                  </a:lnTo>
+                  <a:lnTo>
+                    <a:pt x="7000931" y="14449"/>
+                  </a:lnTo>
+                  <a:lnTo>
+                    <a:pt x="7085280" y="14449"/>
+                  </a:lnTo>
+                  <a:lnTo>
+                    <a:pt x="7085280" y="14449"/>
+                  </a:lnTo>
+                  <a:lnTo>
+                    <a:pt x="7169628" y="14449"/>
+                  </a:lnTo>
+                  <a:lnTo>
+                    <a:pt x="7169628" y="14449"/>
+                  </a:lnTo>
+                  <a:lnTo>
+                    <a:pt x="7253977" y="14449"/>
                   </a:lnTo>
                   <a:lnTo>
                     <a:pt x="7253977" y="0"/>
@@ -4527,8 +4527,8 @@
           </p:nvSpPr>
           <p:spPr>
             <a:xfrm>
-              <a:off x="4103887" y="5285568"/>
-              <a:ext cx="1422623" cy="109362"/>
+              <a:off x="3777811" y="5285568"/>
+              <a:ext cx="2074773" cy="109362"/>
             </a:xfrm>
             <a:prstGeom prst="rect">
               <a:avLst/>
@@ -4560,7 +4560,7 @@
                   <a:latin typeface="Helvetica"/>
                   <a:cs typeface="Helvetica"/>
                 </a:rPr>
-                <a:t>Days from admission</a:t>
+                <a:t>Days from terlipressin initiation</a:t>
               </a:r>
             </a:p>
           </p:txBody>
